--- a/翻译研究方法/第1组/问卷调查法正反例_v17.pptx
+++ b/翻译研究方法/第1组/问卷调查法正反例_v17.pptx
@@ -9413,8 +9413,8 @@
         </p:nvSpPr>
         <p:spPr>
           <a:xfrm>
-            <a:off x="640080" y="1874519"/>
-            <a:ext cx="10881360" cy="1965960"/>
+            <a:off x="640080" y="1630044"/>
+            <a:ext cx="10881360" cy="2192655"/>
           </a:xfrm>
           <a:prstGeom prst="rect">
             <a:avLst/>
@@ -9447,7 +9447,7 @@
                 <a:ea typeface="宋体" panose="02010600030101010101" pitchFamily="2" charset="-122"/>
                 <a:cs typeface="宋体" panose="02010600030101010101" pitchFamily="2" charset="-122"/>
               </a:rPr>
-              <a:t>· Yang &amp; Mustafa（2022），*Human Behavior and Emerging Technologies*，Article 5793054。</a:t>
+              <a:t>· Yang &amp; Mustafa（2022），Human Behavior and Emerging Technologies，Article 5793054。</a:t>
             </a:r>
             <a:endParaRPr sz="2000" b="0" i="0">
               <a:solidFill>
